--- a/module-04-threat-detection/Bandari_Ruthvik_Nath_Module4_AI_Threat_Detection.pptx
+++ b/module-04-threat-detection/Bandari_Ruthvik_Nath_Module4_AI_Threat_Detection.pptx
@@ -1259,7 +1259,7 @@
           <a:lstStyle/>
           <a:p>
             <a:r>
-              <a:t>What threats does it detect best? Denial of service. A flood is statistically loud: the median DoS connection is one of 172 connections to the same host in the previous two seconds, against 4 for normal traffic, and nearly all of them end in SYN errors because the attacker never completes the handshake. The Random Forest picks this up mainly through byte counts, the connection-status flag and connection-pattern features such as count and same-service rate, shown on the right. That is why DoS stayed the best-detected family on the official test set, at 78.9%.</a:t>
+              <a:t>What threats does it detect best? Denial of service. A flood is statistically loud: the median DoS connection is one of 172 connections to the same host in the previous two seconds, against 4 for normal traffic, and most of them end in SYN errors because the attacker never completes the handshake. The Random Forest picks this up mainly through byte counts, the connection-status flag and connection-pattern features such as count and same-service rate, shown on the right. That is why DoS stayed the best-detected family on the official test set, at 78.9%.</a:t>
             </a:r>
           </a:p>
         </p:txBody>
